--- a/logo/logo.pptx
+++ b/logo/logo.pptx
@@ -6,6 +6,7 @@
   </p:sldMasterIdLst>
   <p:sldIdLst>
     <p:sldId id="256" r:id="rId3"/>
+    <p:sldId id="257" r:id="rId4"/>
   </p:sldIdLst>
   <p:sldSz cx="12192000" cy="6858000"/>
   <p:notesSz cx="6858000" cy="9144000"/>
@@ -3079,109 +3080,124 @@
           <a:chExt cx="0" cy="0"/>
         </a:xfrm>
       </p:grpSpPr>
-      <p:pic>
-        <p:nvPicPr>
-          <p:cNvPr id="4" name="图片 3"/>
-          <p:cNvPicPr>
-            <a:picLocks noChangeAspect="1"/>
-          </p:cNvPicPr>
+      <p:grpSp>
+        <p:nvGrpSpPr>
+          <p:cNvPr id="2" name="组合 1"/>
+          <p:cNvGrpSpPr/>
           <p:nvPr/>
-        </p:nvPicPr>
-        <p:blipFill>
-          <a:blip r:embed="rId1"/>
-          <a:srcRect l="3852" t="4704" r="5194" b="4167"/>
-          <a:stretch>
-            <a:fillRect/>
-          </a:stretch>
-        </p:blipFill>
-        <p:spPr>
+        </p:nvGrpSpPr>
+        <p:grpSpPr>
           <a:xfrm>
             <a:off x="2977515" y="322580"/>
-            <a:ext cx="6237605" cy="6249670"/>
+            <a:ext cx="6236970" cy="6249670"/>
+            <a:chOff x="4689" y="508"/>
+            <a:chExt cx="9822" cy="9842"/>
           </a:xfrm>
-          <a:prstGeom prst="roundRect">
-            <a:avLst>
-              <a:gd name="adj" fmla="val 25287"/>
-            </a:avLst>
-          </a:prstGeom>
-        </p:spPr>
-      </p:pic>
-      <p:sp>
-        <p:nvSpPr>
-          <p:cNvPr id="5" name="圆角矩形 4"/>
-          <p:cNvSpPr/>
-          <p:nvPr/>
-        </p:nvSpPr>
-        <p:spPr>
-          <a:xfrm>
-            <a:off x="3430905" y="767080"/>
-            <a:ext cx="5332730" cy="5350510"/>
-          </a:xfrm>
-          <a:prstGeom prst="roundRect">
-            <a:avLst>
-              <a:gd name="adj" fmla="val 20612"/>
-            </a:avLst>
-          </a:prstGeom>
-          <a:solidFill>
-            <a:srgbClr val="103459"/>
-          </a:solidFill>
-          <a:ln>
+        </p:grpSpPr>
+        <p:pic>
+          <p:nvPicPr>
+            <p:cNvPr id="4" name="图片 3"/>
+            <p:cNvPicPr>
+              <a:picLocks noChangeAspect="1"/>
+            </p:cNvPicPr>
+            <p:nvPr/>
+          </p:nvPicPr>
+          <p:blipFill>
+            <a:blip r:embed="rId1"/>
+            <a:srcRect l="3852" t="4704" r="5194" b="4167"/>
+            <a:stretch>
+              <a:fillRect/>
+            </a:stretch>
+          </p:blipFill>
+          <p:spPr>
+            <a:xfrm>
+              <a:off x="4689" y="508"/>
+              <a:ext cx="9823" cy="9842"/>
+            </a:xfrm>
+            <a:prstGeom prst="roundRect">
+              <a:avLst>
+                <a:gd name="adj" fmla="val 25287"/>
+              </a:avLst>
+            </a:prstGeom>
+          </p:spPr>
+        </p:pic>
+        <p:sp>
+          <p:nvSpPr>
+            <p:cNvPr id="5" name="圆角矩形 4"/>
+            <p:cNvSpPr/>
+            <p:nvPr/>
+          </p:nvSpPr>
+          <p:spPr>
+            <a:xfrm>
+              <a:off x="5403" y="1208"/>
+              <a:ext cx="8398" cy="8426"/>
+            </a:xfrm>
+            <a:prstGeom prst="roundRect">
+              <a:avLst>
+                <a:gd name="adj" fmla="val 20612"/>
+              </a:avLst>
+            </a:prstGeom>
             <a:solidFill>
               <a:srgbClr val="103459"/>
             </a:solidFill>
-          </a:ln>
-        </p:spPr>
-        <p:style>
-          <a:lnRef idx="2">
-            <a:schemeClr val="accent1">
-              <a:lumMod val="75000"/>
-            </a:schemeClr>
-          </a:lnRef>
-          <a:fillRef idx="1">
-            <a:schemeClr val="accent1"/>
-          </a:fillRef>
-          <a:effectRef idx="0">
-            <a:srgbClr val="FFFFFF"/>
-          </a:effectRef>
-          <a:fontRef idx="minor">
-            <a:schemeClr val="lt1"/>
-          </a:fontRef>
-        </p:style>
-        <p:txBody>
-          <a:bodyPr rtlCol="0" anchor="ctr"/>
-          <a:p>
-            <a:pPr algn="ctr"/>
-            <a:endParaRPr lang="zh-CN" altLang="en-US"/>
-          </a:p>
-        </p:txBody>
-      </p:sp>
-      <p:pic>
-        <p:nvPicPr>
-          <p:cNvPr id="6" name="图片 5" descr="INTEPOINT-logo-PNG"/>
-          <p:cNvPicPr>
-            <a:picLocks noChangeAspect="1"/>
-          </p:cNvPicPr>
-          <p:nvPr/>
-        </p:nvPicPr>
-        <p:blipFill>
-          <a:blip r:embed="rId2">
-            <a:lum bright="100000" contrast="-24000"/>
-          </a:blip>
-          <a:srcRect l="27319" t="27906" r="27290" b="5649"/>
-          <a:stretch>
-            <a:fillRect/>
-          </a:stretch>
-        </p:blipFill>
-        <p:spPr>
-          <a:xfrm>
-            <a:off x="4070985" y="1513205"/>
-            <a:ext cx="4052570" cy="3869055"/>
-          </a:xfrm>
-          <a:prstGeom prst="rect">
-            <a:avLst/>
-          </a:prstGeom>
-        </p:spPr>
-      </p:pic>
+            <a:ln>
+              <a:solidFill>
+                <a:srgbClr val="103459"/>
+              </a:solidFill>
+            </a:ln>
+          </p:spPr>
+          <p:style>
+            <a:lnRef idx="2">
+              <a:schemeClr val="accent1">
+                <a:lumMod val="75000"/>
+              </a:schemeClr>
+            </a:lnRef>
+            <a:fillRef idx="1">
+              <a:schemeClr val="accent1"/>
+            </a:fillRef>
+            <a:effectRef idx="0">
+              <a:srgbClr val="FFFFFF"/>
+            </a:effectRef>
+            <a:fontRef idx="minor">
+              <a:schemeClr val="lt1"/>
+            </a:fontRef>
+          </p:style>
+          <p:txBody>
+            <a:bodyPr rtlCol="0" anchor="ctr"/>
+            <a:p>
+              <a:pPr algn="ctr"/>
+              <a:endParaRPr lang="zh-CN" altLang="en-US"/>
+            </a:p>
+          </p:txBody>
+        </p:sp>
+        <p:pic>
+          <p:nvPicPr>
+            <p:cNvPr id="6" name="图片 5" descr="INTEPOINT-logo-PNG"/>
+            <p:cNvPicPr>
+              <a:picLocks noChangeAspect="1"/>
+            </p:cNvPicPr>
+            <p:nvPr/>
+          </p:nvPicPr>
+          <p:blipFill>
+            <a:blip r:embed="rId2">
+              <a:lum bright="100000" contrast="-24000"/>
+            </a:blip>
+            <a:srcRect l="27319" t="27906" r="27290" b="5649"/>
+            <a:stretch>
+              <a:fillRect/>
+            </a:stretch>
+          </p:blipFill>
+          <p:spPr>
+            <a:xfrm>
+              <a:off x="6411" y="2383"/>
+              <a:ext cx="6382" cy="6093"/>
+            </a:xfrm>
+            <a:prstGeom prst="rect">
+              <a:avLst/>
+            </a:prstGeom>
+          </p:spPr>
+        </p:pic>
+      </p:grpSp>
     </p:spTree>
     <p:custDataLst>
       <p:tags r:id="rId3"/>
@@ -3193,6 +3209,170 @@
 </p:sld>
 </file>
 
+<file path=ppt/slides/slide2.xml><?xml version="1.0" encoding="utf-8"?>
+<p:sld xmlns:a="http://schemas.openxmlformats.org/drawingml/2006/main" xmlns:r="http://schemas.openxmlformats.org/officeDocument/2006/relationships" xmlns:p="http://schemas.openxmlformats.org/presentationml/2006/main">
+  <p:cSld>
+    <p:spTree>
+      <p:nvGrpSpPr>
+        <p:cNvPr id="1" name=""/>
+        <p:cNvGrpSpPr/>
+        <p:nvPr/>
+      </p:nvGrpSpPr>
+      <p:grpSpPr/>
+      <p:pic>
+        <p:nvPicPr>
+          <p:cNvPr id="5" name="图片 4"/>
+          <p:cNvPicPr>
+            <a:picLocks noChangeAspect="1"/>
+          </p:cNvPicPr>
+          <p:nvPr/>
+        </p:nvPicPr>
+        <p:blipFill>
+          <a:blip r:embed="rId1"/>
+          <a:srcRect t="11880" b="10213"/>
+          <a:stretch>
+            <a:fillRect/>
+          </a:stretch>
+        </p:blipFill>
+        <p:spPr>
+          <a:xfrm>
+            <a:off x="4069715" y="0"/>
+            <a:ext cx="4057015" cy="6853555"/>
+          </a:xfrm>
+          <a:prstGeom prst="rect">
+            <a:avLst/>
+          </a:prstGeom>
+        </p:spPr>
+      </p:pic>
+      <p:grpSp>
+        <p:nvGrpSpPr>
+          <p:cNvPr id="6" name="组合 5"/>
+          <p:cNvGrpSpPr/>
+          <p:nvPr/>
+        </p:nvGrpSpPr>
+        <p:grpSpPr>
+          <a:xfrm>
+            <a:off x="5760720" y="34290"/>
+            <a:ext cx="671195" cy="673100"/>
+            <a:chOff x="4689" y="508"/>
+            <a:chExt cx="9822" cy="9842"/>
+          </a:xfrm>
+        </p:grpSpPr>
+        <p:pic>
+          <p:nvPicPr>
+            <p:cNvPr id="7" name="图片 6"/>
+            <p:cNvPicPr>
+              <a:picLocks noChangeAspect="1"/>
+            </p:cNvPicPr>
+            <p:nvPr/>
+          </p:nvPicPr>
+          <p:blipFill>
+            <a:blip r:embed="rId2"/>
+            <a:srcRect l="3852" t="4704" r="5194" b="4167"/>
+            <a:stretch>
+              <a:fillRect/>
+            </a:stretch>
+          </p:blipFill>
+          <p:spPr>
+            <a:xfrm>
+              <a:off x="4689" y="508"/>
+              <a:ext cx="9823" cy="9842"/>
+            </a:xfrm>
+            <a:prstGeom prst="roundRect">
+              <a:avLst>
+                <a:gd name="adj" fmla="val 25287"/>
+              </a:avLst>
+            </a:prstGeom>
+          </p:spPr>
+        </p:pic>
+        <p:sp>
+          <p:nvSpPr>
+            <p:cNvPr id="8" name="圆角矩形 7"/>
+            <p:cNvSpPr/>
+            <p:nvPr/>
+          </p:nvSpPr>
+          <p:spPr>
+            <a:xfrm>
+              <a:off x="5403" y="1208"/>
+              <a:ext cx="8398" cy="8426"/>
+            </a:xfrm>
+            <a:prstGeom prst="roundRect">
+              <a:avLst>
+                <a:gd name="adj" fmla="val 20612"/>
+              </a:avLst>
+            </a:prstGeom>
+            <a:solidFill>
+              <a:srgbClr val="103459"/>
+            </a:solidFill>
+            <a:ln>
+              <a:solidFill>
+                <a:srgbClr val="103459"/>
+              </a:solidFill>
+            </a:ln>
+          </p:spPr>
+          <p:style>
+            <a:lnRef idx="2">
+              <a:schemeClr val="accent1">
+                <a:lumMod val="75000"/>
+              </a:schemeClr>
+            </a:lnRef>
+            <a:fillRef idx="1">
+              <a:schemeClr val="accent1"/>
+            </a:fillRef>
+            <a:effectRef idx="0">
+              <a:srgbClr val="FFFFFF"/>
+            </a:effectRef>
+            <a:fontRef idx="minor">
+              <a:schemeClr val="lt1"/>
+            </a:fontRef>
+          </p:style>
+          <p:txBody>
+            <a:bodyPr rtlCol="0" anchor="ctr"/>
+            <a:p>
+              <a:pPr algn="ctr"/>
+              <a:endParaRPr lang="zh-CN" altLang="en-US"/>
+            </a:p>
+          </p:txBody>
+        </p:sp>
+        <p:pic>
+          <p:nvPicPr>
+            <p:cNvPr id="9" name="图片 8" descr="INTEPOINT-logo-PNG"/>
+            <p:cNvPicPr>
+              <a:picLocks noChangeAspect="1"/>
+            </p:cNvPicPr>
+            <p:nvPr/>
+          </p:nvPicPr>
+          <p:blipFill>
+            <a:blip r:embed="rId3">
+              <a:lum bright="100000" contrast="-24000"/>
+            </a:blip>
+            <a:srcRect l="27319" t="27906" r="27290" b="5649"/>
+            <a:stretch>
+              <a:fillRect/>
+            </a:stretch>
+          </p:blipFill>
+          <p:spPr>
+            <a:xfrm>
+              <a:off x="6411" y="2383"/>
+              <a:ext cx="6382" cy="6093"/>
+            </a:xfrm>
+            <a:prstGeom prst="rect">
+              <a:avLst/>
+            </a:prstGeom>
+          </p:spPr>
+        </p:pic>
+      </p:grpSp>
+    </p:spTree>
+    <p:custDataLst>
+      <p:tags r:id="rId4"/>
+    </p:custDataLst>
+  </p:cSld>
+  <p:clrMapOvr>
+    <a:masterClrMapping/>
+  </p:clrMapOvr>
+</p:sld>
+</file>
+
 <file path=ppt/tags/tag1.xml><?xml version="1.0" encoding="utf-8"?>
 <p:tagLst xmlns:p="http://schemas.openxmlformats.org/presentationml/2006/main">
   <p:tag name="KSO_WM_UNIT_HIGHLIGHT" val="0"/>
@@ -3983,6 +4163,14 @@
   <p:tag name="KSO_WM_SLIDE_LAYOUT_CNT" val="1_1"/>
   <p:tag name="KSO_WM_UNIT_SHOW_EDIT_AREA_INDICATION" val="1"/>
   <p:tag name="KSO_WM_TEMPLATE_THUMBS_INDEX" val="1、4、7、12、13、14、15、16、17、18、20、24、25、28、33、36、40、43、44"/>
+</p:tagLst>
+</file>
+
+<file path=ppt/tags/tag64.xml><?xml version="1.0" encoding="utf-8"?>
+<p:tagLst xmlns:p="http://schemas.openxmlformats.org/presentationml/2006/main">
+  <p:tag name="KSO_WM_BEAUTIFY_FLAG" val="#wm#"/>
+  <p:tag name="KSO_WM_TEMPLATE_CATEGORY" val="custom"/>
+  <p:tag name="KSO_WM_TEMPLATE_INDEX" val="20205081"/>
 </p:tagLst>
 </file>
 
